--- a/assets/figures-editable/c1-c2/c1-e01.pptx
+++ b/assets/figures-editable/c1-c2/c1-e01.pptx
@@ -7,7 +7,7 @@
   <p:sldIdLst>
     <p:sldId id="256" r:id="rId7"/>
   </p:sldIdLst>
-  <p:sldSz cx="11948160" cy="8095488" type="screen4x3"/>
+  <p:sldSz cx="12191695" cy="6858000" type="screen4x3"/>
   <p:notesSz cx="6858000" cy="9144000"/>
   <p:defaultTextStyle>
     <a:defPPr>
@@ -3098,14 +3098,14 @@
       <p:grpSpPr/>
       <p:sp>
         <p:nvSpPr>
-          <p:cNvPr id="2" name="text1" descr="sci-ppt:C1-E01-001"/>
+          <p:cNvPr id="2" name="C1-E01 text 0" descr="sci-ppt:o000"/>
           <p:cNvSpPr txBox="1"/>
           <p:nvPr/>
         </p:nvSpPr>
         <p:spPr>
           <a:xfrm>
-            <a:off x="316992" y="268224"/>
-            <a:ext cx="11277600" cy="359054"/>
+            <a:off x="274320" y="118872"/>
+            <a:ext cx="11612880" cy="340105"/>
           </a:xfrm>
           <a:prstGeom prst="rect">
             <a:avLst/>
@@ -3114,7 +3114,7 @@
           <a:effectLst/>
         </p:spPr>
         <p:txBody>
-          <a:bodyPr wrap="none" lIns="27432" rIns="27432" tIns="18288" bIns="18288" anchor="ctr">
+          <a:bodyPr wrap="none" lIns="18288" rIns="18288" tIns="18288" bIns="18288" anchor="t">
             <a:spAutoFit/>
           </a:bodyPr>
           <a:lstStyle/>
@@ -3125,37 +3125,37 @@
               </a:spcAft>
             </a:pPr>
             <a:r>
-              <a:rPr sz="1823" b="0" i="0">
+              <a:rPr sz="1900" b="1" i="0">
                 <a:solidFill>
                   <a:srgbClr val="8EDBD4"/>
                 </a:solidFill>
                 <a:latin typeface="Arial"/>
               </a:rPr>
-              <a:t>C1-E01 | Physical-variable diagram</a:t>
-            </a:r>
-          </a:p>
-        </p:txBody>
-      </p:sp>
-      <p:sp>
-        <p:nvSpPr>
-          <p:cNvPr id="3" name="ellipse2" descr="sci-ppt:C1-E01-002"/>
+              <a:t>C1-E01 · Prescribed initial and boundary conditions</a:t>
+            </a:r>
+          </a:p>
+        </p:txBody>
+      </p:sp>
+      <p:sp>
+        <p:nvSpPr>
+          <p:cNvPr id="3" name="C1-E01 round_rect 1" descr="sci-ppt:o001"/>
           <p:cNvSpPr/>
           <p:nvPr/>
         </p:nvSpPr>
         <p:spPr>
           <a:xfrm>
-            <a:off x="2072640" y="1402080"/>
-            <a:ext cx="2438400" cy="2438400"/>
-          </a:xfrm>
-          <a:prstGeom prst="ellipse">
+            <a:off x="365760" y="914400"/>
+            <a:ext cx="4297680" cy="4846320"/>
+          </a:xfrm>
+          <a:prstGeom prst="roundRect">
             <a:avLst/>
           </a:prstGeom>
           <a:solidFill>
-            <a:srgbClr val="213E4B"/>
+            <a:srgbClr val="1E4A5A"/>
           </a:solidFill>
-          <a:ln w="21590">
+          <a:ln w="19050">
             <a:solidFill>
-              <a:srgbClr val="B4C7D2"/>
+              <a:srgbClr val="2B6678"/>
             </a:solidFill>
           </a:ln>
           <a:effectLst/>
@@ -3168,21 +3168,323 @@
           </a:p>
         </p:txBody>
       </p:sp>
+      <p:sp>
+        <p:nvSpPr>
+          <p:cNvPr id="4" name="C1-E01 text 2" descr="sci-ppt:o002"/>
+          <p:cNvSpPr txBox="1"/>
+          <p:nvPr/>
+        </p:nvSpPr>
+        <p:spPr>
+          <a:xfrm>
+            <a:off x="502920" y="978408"/>
+            <a:ext cx="4023360" cy="262636"/>
+          </a:xfrm>
+          <a:prstGeom prst="rect">
+            <a:avLst/>
+          </a:prstGeom>
+          <a:noFill/>
+          <a:effectLst/>
+        </p:spPr>
+        <p:txBody>
+          <a:bodyPr wrap="none" lIns="18288" rIns="18288" tIns="18288" bIns="18288" anchor="t">
+            <a:spAutoFit/>
+          </a:bodyPr>
+          <a:lstStyle/>
+          <a:p>
+            <a:pPr algn="l">
+              <a:spcAft>
+                <a:spcPts val="0"/>
+              </a:spcAft>
+            </a:pPr>
+            <a:r>
+              <a:rPr sz="1400" b="1" i="0">
+                <a:solidFill>
+                  <a:srgbClr val="8EDBD4"/>
+                </a:solidFill>
+                <a:latin typeface="Arial"/>
+              </a:rPr>
+              <a:t>State at t = 0</a:t>
+            </a:r>
+          </a:p>
+        </p:txBody>
+      </p:sp>
+      <p:sp>
+        <p:nvSpPr>
+          <p:cNvPr id="5" name="C1-E01 ellipse 3" descr="sci-ppt:o003"/>
+          <p:cNvSpPr/>
+          <p:nvPr/>
+        </p:nvSpPr>
+        <p:spPr>
+          <a:xfrm>
+            <a:off x="1389888" y="2121408"/>
+            <a:ext cx="2249424" cy="2249424"/>
+          </a:xfrm>
+          <a:prstGeom prst="ellipse">
+            <a:avLst/>
+          </a:prstGeom>
+          <a:noFill/>
+          <a:ln w="15240">
+            <a:solidFill>
+              <a:srgbClr val="2B6678">
+                <a:alpha val="80000"/>
+              </a:srgbClr>
+            </a:solidFill>
+          </a:ln>
+          <a:effectLst/>
+        </p:spPr>
+        <p:txBody>
+          <a:bodyPr rtlCol="0" anchor="ctr"/>
+          <a:lstStyle/>
+          <a:p>
+            <a:pPr algn="ctr"/>
+          </a:p>
+        </p:txBody>
+      </p:sp>
+      <p:sp>
+        <p:nvSpPr>
+          <p:cNvPr id="6" name="C1-E01 ellipse 4" descr="sci-ppt:o004"/>
+          <p:cNvSpPr/>
+          <p:nvPr/>
+        </p:nvSpPr>
+        <p:spPr>
+          <a:xfrm>
+            <a:off x="1042416" y="1773936"/>
+            <a:ext cx="2944368" cy="2944368"/>
+          </a:xfrm>
+          <a:prstGeom prst="ellipse">
+            <a:avLst/>
+          </a:prstGeom>
+          <a:noFill/>
+          <a:ln w="15240">
+            <a:solidFill>
+              <a:srgbClr val="2B6678">
+                <a:alpha val="62000"/>
+              </a:srgbClr>
+            </a:solidFill>
+          </a:ln>
+          <a:effectLst/>
+        </p:spPr>
+        <p:txBody>
+          <a:bodyPr rtlCol="0" anchor="ctr"/>
+          <a:lstStyle/>
+          <a:p>
+            <a:pPr algn="ctr"/>
+          </a:p>
+        </p:txBody>
+      </p:sp>
+      <p:sp>
+        <p:nvSpPr>
+          <p:cNvPr id="7" name="C1-E01 ellipse 5" descr="sci-ppt:o005"/>
+          <p:cNvSpPr/>
+          <p:nvPr/>
+        </p:nvSpPr>
+        <p:spPr>
+          <a:xfrm>
+            <a:off x="694943" y="1426463"/>
+            <a:ext cx="3639312" cy="3639312"/>
+          </a:xfrm>
+          <a:prstGeom prst="ellipse">
+            <a:avLst/>
+          </a:prstGeom>
+          <a:noFill/>
+          <a:ln w="15240">
+            <a:solidFill>
+              <a:srgbClr val="2B6678">
+                <a:alpha val="44000"/>
+              </a:srgbClr>
+            </a:solidFill>
+          </a:ln>
+          <a:effectLst/>
+        </p:spPr>
+        <p:txBody>
+          <a:bodyPr rtlCol="0" anchor="ctr"/>
+          <a:lstStyle/>
+          <a:p>
+            <a:pPr algn="ctr"/>
+          </a:p>
+        </p:txBody>
+      </p:sp>
+      <p:sp>
+        <p:nvSpPr>
+          <p:cNvPr id="8" name="C1-E01 ellipse 6" descr="sci-ppt:o006"/>
+          <p:cNvSpPr/>
+          <p:nvPr/>
+        </p:nvSpPr>
+        <p:spPr>
+          <a:xfrm>
+            <a:off x="347471" y="1078991"/>
+            <a:ext cx="4334256" cy="4334256"/>
+          </a:xfrm>
+          <a:prstGeom prst="ellipse">
+            <a:avLst/>
+          </a:prstGeom>
+          <a:noFill/>
+          <a:ln w="15240">
+            <a:solidFill>
+              <a:srgbClr val="2B6678">
+                <a:alpha val="26000"/>
+              </a:srgbClr>
+            </a:solidFill>
+          </a:ln>
+          <a:effectLst/>
+        </p:spPr>
+        <p:txBody>
+          <a:bodyPr rtlCol="0" anchor="ctr"/>
+          <a:lstStyle/>
+          <a:p>
+            <a:pPr algn="ctr"/>
+          </a:p>
+        </p:txBody>
+      </p:sp>
+      <p:sp>
+        <p:nvSpPr>
+          <p:cNvPr id="9" name="C1-E01 ellipse 7" descr="sci-ppt:o007"/>
+          <p:cNvSpPr/>
+          <p:nvPr/>
+        </p:nvSpPr>
+        <p:spPr>
+          <a:xfrm>
+            <a:off x="1737360" y="2468879"/>
+            <a:ext cx="1554480" cy="1554480"/>
+          </a:xfrm>
+          <a:prstGeom prst="ellipse">
+            <a:avLst/>
+          </a:prstGeom>
+          <a:solidFill>
+            <a:srgbClr val="0C1820"/>
+          </a:solidFill>
+          <a:ln w="27940">
+            <a:solidFill>
+              <a:srgbClr val="F2B880"/>
+            </a:solidFill>
+          </a:ln>
+          <a:effectLst/>
+        </p:spPr>
+        <p:txBody>
+          <a:bodyPr rtlCol="0" anchor="ctr"/>
+          <a:lstStyle/>
+          <a:p>
+            <a:pPr algn="ctr"/>
+          </a:p>
+        </p:txBody>
+      </p:sp>
+      <p:sp>
+        <p:nvSpPr>
+          <p:cNvPr id="10" name="C1-E01 text 8" descr="sci-ppt:o008"/>
+          <p:cNvSpPr txBox="1"/>
+          <p:nvPr/>
+        </p:nvSpPr>
+        <p:spPr>
+          <a:xfrm>
+            <a:off x="2148840" y="2788920"/>
+            <a:ext cx="731520" cy="231648"/>
+          </a:xfrm>
+          <a:prstGeom prst="rect">
+            <a:avLst/>
+          </a:prstGeom>
+          <a:noFill/>
+          <a:effectLst/>
+        </p:spPr>
+        <p:txBody>
+          <a:bodyPr wrap="none" lIns="18288" rIns="18288" tIns="18288" bIns="18288" anchor="t">
+            <a:spAutoFit/>
+          </a:bodyPr>
+          <a:lstStyle/>
+          <a:p>
+            <a:pPr algn="ctr">
+              <a:spcAft>
+                <a:spcPts val="0"/>
+              </a:spcAft>
+            </a:pPr>
+            <a:r>
+              <a:rPr sz="1200" b="0" i="0">
+                <a:solidFill>
+                  <a:srgbClr val="B4C7D2"/>
+                </a:solidFill>
+                <a:latin typeface="Arial"/>
+              </a:rPr>
+              <a:t>gas</a:t>
+            </a:r>
+          </a:p>
+        </p:txBody>
+      </p:sp>
       <p:cxnSp>
         <p:nvCxnSpPr>
-          <p:cNvPr id="4" name="arrow3" descr="sci-ppt:C1-E01-003"/>
+          <p:cNvPr id="11" name="C1-E01 line 9" descr="sci-ppt:o009"/>
           <p:cNvCxnSpPr/>
           <p:nvPr/>
         </p:nvCxnSpPr>
         <p:spPr>
           <a:xfrm>
-            <a:off x="3291840" y="2621280"/>
-            <a:ext cx="1219200" cy="0"/>
+            <a:off x="2514600" y="3246120"/>
+            <a:ext cx="777240" cy="0"/>
           </a:xfrm>
           <a:prstGeom prst="line">
             <a:avLst/>
           </a:prstGeom>
-          <a:ln w="25400">
+          <a:ln w="27940">
+            <a:solidFill>
+              <a:srgbClr val="F2B880"/>
+            </a:solidFill>
+          </a:ln>
+          <a:effectLst/>
+        </p:spPr>
+      </p:cxnSp>
+      <p:sp>
+        <p:nvSpPr>
+          <p:cNvPr id="12" name="C1-E01 text 10" descr="sci-ppt:o010"/>
+          <p:cNvSpPr txBox="1"/>
+          <p:nvPr/>
+        </p:nvSpPr>
+        <p:spPr>
+          <a:xfrm>
+            <a:off x="2697480" y="3291839"/>
+            <a:ext cx="640080" cy="262636"/>
+          </a:xfrm>
+          <a:prstGeom prst="rect">
+            <a:avLst/>
+          </a:prstGeom>
+          <a:noFill/>
+          <a:effectLst/>
+        </p:spPr>
+        <p:txBody>
+          <a:bodyPr wrap="none" lIns="18288" rIns="18288" tIns="18288" bIns="18288" anchor="t">
+            <a:spAutoFit/>
+          </a:bodyPr>
+          <a:lstStyle/>
+          <a:p>
+            <a:pPr algn="l">
+              <a:spcAft>
+                <a:spcPts val="0"/>
+              </a:spcAft>
+            </a:pPr>
+            <a:r>
+              <a:rPr sz="1400" b="1" i="0">
+                <a:solidFill>
+                  <a:srgbClr val="F2B880"/>
+                </a:solidFill>
+                <a:latin typeface="Arial"/>
+              </a:rPr>
+              <a:t>R₀</a:t>
+            </a:r>
+          </a:p>
+        </p:txBody>
+      </p:sp>
+      <p:cxnSp>
+        <p:nvCxnSpPr>
+          <p:cNvPr id="13" name="C1-E01 arrow 11" descr="sci-ppt:o011"/>
+          <p:cNvCxnSpPr/>
+          <p:nvPr/>
+        </p:nvCxnSpPr>
+        <p:spPr>
+          <a:xfrm flipV="1">
+            <a:off x="3014200" y="2090342"/>
+            <a:ext cx="470212" cy="560377"/>
+          </a:xfrm>
+          <a:prstGeom prst="line">
+            <a:avLst/>
+          </a:prstGeom>
+          <a:ln w="38100">
             <a:solidFill>
               <a:srgbClr val="8EDBD4"/>
             </a:solidFill>
@@ -3194,14 +3496,14 @@
       </p:cxnSp>
       <p:sp>
         <p:nvSpPr>
-          <p:cNvPr id="5" name="text4" descr="sci-ppt:C1-E01-004"/>
+          <p:cNvPr id="14" name="C1-E01 text 12" descr="sci-ppt:o012"/>
           <p:cNvSpPr txBox="1"/>
           <p:nvPr/>
         </p:nvSpPr>
         <p:spPr>
           <a:xfrm>
-            <a:off x="3474720" y="2133600"/>
-            <a:ext cx="1584960" cy="396849"/>
+            <a:off x="3429000" y="1417319"/>
+            <a:ext cx="1737360" cy="262636"/>
           </a:xfrm>
           <a:prstGeom prst="rect">
             <a:avLst/>
@@ -3210,7 +3512,7 @@
           <a:effectLst/>
         </p:spPr>
         <p:txBody>
-          <a:bodyPr wrap="none" lIns="27432" rIns="27432" tIns="18288" bIns="18288" anchor="ctr">
+          <a:bodyPr wrap="none" lIns="18288" rIns="18288" tIns="18288" bIns="18288" anchor="t">
             <a:spAutoFit/>
           </a:bodyPr>
           <a:lstStyle/>
@@ -3221,27 +3523,259 @@
               </a:spcAft>
             </a:pPr>
             <a:r>
-              <a:rPr sz="2016" b="0" i="0">
+              <a:rPr sz="1400" b="1" i="0">
+                <a:solidFill>
+                  <a:srgbClr val="8EDBD4"/>
+                </a:solidFill>
+                <a:latin typeface="Arial"/>
+              </a:rPr>
+              <a:t>Ṙ(0) = U₀</a:t>
+            </a:r>
+          </a:p>
+        </p:txBody>
+      </p:sp>
+      <p:cxnSp>
+        <p:nvCxnSpPr>
+          <p:cNvPr id="15" name="C1-E01 arrow 13" descr="sci-ppt:o013"/>
+          <p:cNvCxnSpPr/>
+          <p:nvPr/>
+        </p:nvCxnSpPr>
+        <p:spPr>
+          <a:xfrm flipV="1">
+            <a:off x="640080" y="4754880"/>
+            <a:ext cx="0" cy="411480"/>
+          </a:xfrm>
+          <a:prstGeom prst="line">
+            <a:avLst/>
+          </a:prstGeom>
+          <a:ln w="19050">
+            <a:solidFill>
+              <a:srgbClr val="B4C7D2">
+                <a:alpha val="60000"/>
+              </a:srgbClr>
+            </a:solidFill>
+            <a:headEnd type="none" w="med" len="med"/>
+            <a:tailEnd type="triangle" w="med" len="med"/>
+          </a:ln>
+          <a:effectLst/>
+        </p:spPr>
+      </p:cxnSp>
+      <p:cxnSp>
+        <p:nvCxnSpPr>
+          <p:cNvPr id="16" name="C1-E01 arrow 14" descr="sci-ppt:o014"/>
+          <p:cNvCxnSpPr/>
+          <p:nvPr/>
+        </p:nvCxnSpPr>
+        <p:spPr>
+          <a:xfrm flipV="1">
+            <a:off x="1645920" y="4754880"/>
+            <a:ext cx="0" cy="411480"/>
+          </a:xfrm>
+          <a:prstGeom prst="line">
+            <a:avLst/>
+          </a:prstGeom>
+          <a:ln w="19050">
+            <a:solidFill>
+              <a:srgbClr val="B4C7D2">
+                <a:alpha val="60000"/>
+              </a:srgbClr>
+            </a:solidFill>
+            <a:headEnd type="none" w="med" len="med"/>
+            <a:tailEnd type="triangle" w="med" len="med"/>
+          </a:ln>
+          <a:effectLst/>
+        </p:spPr>
+      </p:cxnSp>
+      <p:cxnSp>
+        <p:nvCxnSpPr>
+          <p:cNvPr id="17" name="C1-E01 arrow 15" descr="sci-ppt:o015"/>
+          <p:cNvCxnSpPr/>
+          <p:nvPr/>
+        </p:nvCxnSpPr>
+        <p:spPr>
+          <a:xfrm flipV="1">
+            <a:off x="2651760" y="4754880"/>
+            <a:ext cx="0" cy="411480"/>
+          </a:xfrm>
+          <a:prstGeom prst="line">
+            <a:avLst/>
+          </a:prstGeom>
+          <a:ln w="19050">
+            <a:solidFill>
+              <a:srgbClr val="B4C7D2">
+                <a:alpha val="60000"/>
+              </a:srgbClr>
+            </a:solidFill>
+            <a:headEnd type="none" w="med" len="med"/>
+            <a:tailEnd type="triangle" w="med" len="med"/>
+          </a:ln>
+          <a:effectLst/>
+        </p:spPr>
+      </p:cxnSp>
+      <p:cxnSp>
+        <p:nvCxnSpPr>
+          <p:cNvPr id="18" name="C1-E01 arrow 16" descr="sci-ppt:o016"/>
+          <p:cNvCxnSpPr/>
+          <p:nvPr/>
+        </p:nvCxnSpPr>
+        <p:spPr>
+          <a:xfrm flipV="1">
+            <a:off x="3657600" y="4754880"/>
+            <a:ext cx="0" cy="411480"/>
+          </a:xfrm>
+          <a:prstGeom prst="line">
+            <a:avLst/>
+          </a:prstGeom>
+          <a:ln w="19050">
+            <a:solidFill>
+              <a:srgbClr val="B4C7D2">
+                <a:alpha val="60000"/>
+              </a:srgbClr>
+            </a:solidFill>
+            <a:headEnd type="none" w="med" len="med"/>
+            <a:tailEnd type="triangle" w="med" len="med"/>
+          </a:ln>
+          <a:effectLst/>
+        </p:spPr>
+      </p:cxnSp>
+      <p:sp>
+        <p:nvSpPr>
+          <p:cNvPr id="19" name="C1-E01 text 17" descr="sci-ppt:o017"/>
+          <p:cNvSpPr txBox="1"/>
+          <p:nvPr/>
+        </p:nvSpPr>
+        <p:spPr>
+          <a:xfrm>
+            <a:off x="502920" y="5212080"/>
+            <a:ext cx="4023360" cy="247142"/>
+          </a:xfrm>
+          <a:prstGeom prst="rect">
+            <a:avLst/>
+          </a:prstGeom>
+          <a:noFill/>
+          <a:effectLst/>
+        </p:spPr>
+        <p:txBody>
+          <a:bodyPr wrap="none" lIns="18288" rIns="18288" tIns="18288" bIns="18288" anchor="t">
+            <a:spAutoFit/>
+          </a:bodyPr>
+          <a:lstStyle/>
+          <a:p>
+            <a:pPr algn="l">
+              <a:spcAft>
+                <a:spcPts val="0"/>
+              </a:spcAft>
+            </a:pPr>
+            <a:r>
+              <a:rPr sz="1300" b="0" i="0">
                 <a:solidFill>
                   <a:srgbClr val="E7F0F3"/>
                 </a:solidFill>
                 <a:latin typeface="Arial"/>
               </a:rPr>
-              <a:t>R(t)</a:t>
-            </a:r>
-          </a:p>
-        </p:txBody>
-      </p:sp>
-      <p:sp>
-        <p:nvSpPr>
-          <p:cNvPr id="6" name="text5" descr="sci-ppt:C1-E01-005"/>
+              <a:t>far field r → ∞:  u → 0,  p → p∞(t)</a:t>
+            </a:r>
+          </a:p>
+        </p:txBody>
+      </p:sp>
+      <p:cxnSp>
+        <p:nvCxnSpPr>
+          <p:cNvPr id="20" name="C1-E01 line 18" descr="sci-ppt:o018"/>
+          <p:cNvCxnSpPr/>
+          <p:nvPr/>
+        </p:nvCxnSpPr>
+        <p:spPr>
+          <a:xfrm>
+            <a:off x="5669280" y="5303520"/>
+            <a:ext cx="5760720" cy="0"/>
+          </a:xfrm>
+          <a:prstGeom prst="line">
+            <a:avLst/>
+          </a:prstGeom>
+          <a:ln w="19050">
+            <a:solidFill>
+              <a:srgbClr val="B4C7D2"/>
+            </a:solidFill>
+          </a:ln>
+          <a:effectLst/>
+        </p:spPr>
+      </p:cxnSp>
+      <p:cxnSp>
+        <p:nvCxnSpPr>
+          <p:cNvPr id="21" name="C1-E01 line 19" descr="sci-ppt:o019"/>
+          <p:cNvCxnSpPr/>
+          <p:nvPr/>
+        </p:nvCxnSpPr>
+        <p:spPr>
+          <a:xfrm>
+            <a:off x="5669280" y="1371600"/>
+            <a:ext cx="0" cy="3931920"/>
+          </a:xfrm>
+          <a:prstGeom prst="line">
+            <a:avLst/>
+          </a:prstGeom>
+          <a:ln w="19050">
+            <a:solidFill>
+              <a:srgbClr val="B4C7D2"/>
+            </a:solidFill>
+          </a:ln>
+          <a:effectLst/>
+        </p:spPr>
+      </p:cxnSp>
+      <p:cxnSp>
+        <p:nvCxnSpPr>
+          <p:cNvPr id="22" name="C1-E01 line 20" descr="sci-ppt:o020"/>
+          <p:cNvCxnSpPr/>
+          <p:nvPr/>
+        </p:nvCxnSpPr>
+        <p:spPr>
+          <a:xfrm>
+            <a:off x="5669280" y="5303520"/>
+            <a:ext cx="0" cy="64008"/>
+          </a:xfrm>
+          <a:prstGeom prst="line">
+            <a:avLst/>
+          </a:prstGeom>
+          <a:ln w="12700">
+            <a:solidFill>
+              <a:srgbClr val="B4C7D2"/>
+            </a:solidFill>
+          </a:ln>
+          <a:effectLst/>
+        </p:spPr>
+      </p:cxnSp>
+      <p:cxnSp>
+        <p:nvCxnSpPr>
+          <p:cNvPr id="23" name="C1-E01 line 21" descr="sci-ppt:o021"/>
+          <p:cNvCxnSpPr/>
+          <p:nvPr/>
+        </p:nvCxnSpPr>
+        <p:spPr>
+          <a:xfrm>
+            <a:off x="5669280" y="1371600"/>
+            <a:ext cx="0" cy="3931920"/>
+          </a:xfrm>
+          <a:prstGeom prst="line">
+            <a:avLst/>
+          </a:prstGeom>
+          <a:ln w="7620">
+            <a:solidFill>
+              <a:srgbClr val="2E4756"/>
+            </a:solidFill>
+          </a:ln>
+          <a:effectLst/>
+        </p:spPr>
+      </p:cxnSp>
+      <p:sp>
+        <p:nvSpPr>
+          <p:cNvPr id="24" name="C1-E01 text 22" descr="sci-ppt:o022"/>
           <p:cNvSpPr txBox="1"/>
           <p:nvPr/>
         </p:nvSpPr>
         <p:spPr>
           <a:xfrm>
-            <a:off x="2682240" y="2804160"/>
-            <a:ext cx="2194560" cy="377952"/>
+            <a:off x="5212080" y="5385816"/>
+            <a:ext cx="914400" cy="208407"/>
           </a:xfrm>
           <a:prstGeom prst="rect">
             <a:avLst/>
@@ -3250,7 +3784,697 @@
           <a:effectLst/>
         </p:spPr>
         <p:txBody>
-          <a:bodyPr wrap="none" lIns="27432" rIns="27432" tIns="18288" bIns="18288" anchor="ctr">
+          <a:bodyPr wrap="none" lIns="18288" rIns="18288" tIns="18288" bIns="18288" anchor="t">
+            <a:spAutoFit/>
+          </a:bodyPr>
+          <a:lstStyle/>
+          <a:p>
+            <a:pPr algn="ctr">
+              <a:spcAft>
+                <a:spcPts val="0"/>
+              </a:spcAft>
+            </a:pPr>
+            <a:r>
+              <a:rPr sz="1050" b="0" i="0">
+                <a:solidFill>
+                  <a:srgbClr val="B4C7D2"/>
+                </a:solidFill>
+                <a:latin typeface="Arial"/>
+              </a:rPr>
+              <a:t>0.0</a:t>
+            </a:r>
+          </a:p>
+        </p:txBody>
+      </p:sp>
+      <p:cxnSp>
+        <p:nvCxnSpPr>
+          <p:cNvPr id="25" name="C1-E01 line 23" descr="sci-ppt:o023"/>
+          <p:cNvCxnSpPr/>
+          <p:nvPr/>
+        </p:nvCxnSpPr>
+        <p:spPr>
+          <a:xfrm>
+            <a:off x="7109460" y="5303520"/>
+            <a:ext cx="0" cy="64008"/>
+          </a:xfrm>
+          <a:prstGeom prst="line">
+            <a:avLst/>
+          </a:prstGeom>
+          <a:ln w="12700">
+            <a:solidFill>
+              <a:srgbClr val="B4C7D2"/>
+            </a:solidFill>
+          </a:ln>
+          <a:effectLst/>
+        </p:spPr>
+      </p:cxnSp>
+      <p:cxnSp>
+        <p:nvCxnSpPr>
+          <p:cNvPr id="26" name="C1-E01 line 24" descr="sci-ppt:o024"/>
+          <p:cNvCxnSpPr/>
+          <p:nvPr/>
+        </p:nvCxnSpPr>
+        <p:spPr>
+          <a:xfrm>
+            <a:off x="7109460" y="1371600"/>
+            <a:ext cx="0" cy="3931920"/>
+          </a:xfrm>
+          <a:prstGeom prst="line">
+            <a:avLst/>
+          </a:prstGeom>
+          <a:ln w="7620">
+            <a:solidFill>
+              <a:srgbClr val="2E4756"/>
+            </a:solidFill>
+          </a:ln>
+          <a:effectLst/>
+        </p:spPr>
+      </p:cxnSp>
+      <p:sp>
+        <p:nvSpPr>
+          <p:cNvPr id="27" name="C1-E01 text 25" descr="sci-ppt:o025"/>
+          <p:cNvSpPr txBox="1"/>
+          <p:nvPr/>
+        </p:nvSpPr>
+        <p:spPr>
+          <a:xfrm>
+            <a:off x="6652260" y="5385816"/>
+            <a:ext cx="914400" cy="208407"/>
+          </a:xfrm>
+          <a:prstGeom prst="rect">
+            <a:avLst/>
+          </a:prstGeom>
+          <a:noFill/>
+          <a:effectLst/>
+        </p:spPr>
+        <p:txBody>
+          <a:bodyPr wrap="none" lIns="18288" rIns="18288" tIns="18288" bIns="18288" anchor="t">
+            <a:spAutoFit/>
+          </a:bodyPr>
+          <a:lstStyle/>
+          <a:p>
+            <a:pPr algn="ctr">
+              <a:spcAft>
+                <a:spcPts val="0"/>
+              </a:spcAft>
+            </a:pPr>
+            <a:r>
+              <a:rPr sz="1050" b="0" i="0">
+                <a:solidFill>
+                  <a:srgbClr val="B4C7D2"/>
+                </a:solidFill>
+                <a:latin typeface="Arial"/>
+              </a:rPr>
+              <a:t>0.4</a:t>
+            </a:r>
+          </a:p>
+        </p:txBody>
+      </p:sp>
+      <p:cxnSp>
+        <p:nvCxnSpPr>
+          <p:cNvPr id="28" name="C1-E01 line 26" descr="sci-ppt:o026"/>
+          <p:cNvCxnSpPr/>
+          <p:nvPr/>
+        </p:nvCxnSpPr>
+        <p:spPr>
+          <a:xfrm>
+            <a:off x="8549640" y="5303520"/>
+            <a:ext cx="0" cy="64008"/>
+          </a:xfrm>
+          <a:prstGeom prst="line">
+            <a:avLst/>
+          </a:prstGeom>
+          <a:ln w="12700">
+            <a:solidFill>
+              <a:srgbClr val="B4C7D2"/>
+            </a:solidFill>
+          </a:ln>
+          <a:effectLst/>
+        </p:spPr>
+      </p:cxnSp>
+      <p:cxnSp>
+        <p:nvCxnSpPr>
+          <p:cNvPr id="29" name="C1-E01 line 27" descr="sci-ppt:o027"/>
+          <p:cNvCxnSpPr/>
+          <p:nvPr/>
+        </p:nvCxnSpPr>
+        <p:spPr>
+          <a:xfrm>
+            <a:off x="8549640" y="1371600"/>
+            <a:ext cx="0" cy="3931920"/>
+          </a:xfrm>
+          <a:prstGeom prst="line">
+            <a:avLst/>
+          </a:prstGeom>
+          <a:ln w="7620">
+            <a:solidFill>
+              <a:srgbClr val="2E4756"/>
+            </a:solidFill>
+          </a:ln>
+          <a:effectLst/>
+        </p:spPr>
+      </p:cxnSp>
+      <p:sp>
+        <p:nvSpPr>
+          <p:cNvPr id="30" name="C1-E01 text 28" descr="sci-ppt:o028"/>
+          <p:cNvSpPr txBox="1"/>
+          <p:nvPr/>
+        </p:nvSpPr>
+        <p:spPr>
+          <a:xfrm>
+            <a:off x="8092440" y="5385816"/>
+            <a:ext cx="914400" cy="208407"/>
+          </a:xfrm>
+          <a:prstGeom prst="rect">
+            <a:avLst/>
+          </a:prstGeom>
+          <a:noFill/>
+          <a:effectLst/>
+        </p:spPr>
+        <p:txBody>
+          <a:bodyPr wrap="none" lIns="18288" rIns="18288" tIns="18288" bIns="18288" anchor="t">
+            <a:spAutoFit/>
+          </a:bodyPr>
+          <a:lstStyle/>
+          <a:p>
+            <a:pPr algn="ctr">
+              <a:spcAft>
+                <a:spcPts val="0"/>
+              </a:spcAft>
+            </a:pPr>
+            <a:r>
+              <a:rPr sz="1050" b="0" i="0">
+                <a:solidFill>
+                  <a:srgbClr val="B4C7D2"/>
+                </a:solidFill>
+                <a:latin typeface="Arial"/>
+              </a:rPr>
+              <a:t>0.8</a:t>
+            </a:r>
+          </a:p>
+        </p:txBody>
+      </p:sp>
+      <p:cxnSp>
+        <p:nvCxnSpPr>
+          <p:cNvPr id="31" name="C1-E01 line 29" descr="sci-ppt:o029"/>
+          <p:cNvCxnSpPr/>
+          <p:nvPr/>
+        </p:nvCxnSpPr>
+        <p:spPr>
+          <a:xfrm>
+            <a:off x="9989819" y="5303520"/>
+            <a:ext cx="0" cy="64008"/>
+          </a:xfrm>
+          <a:prstGeom prst="line">
+            <a:avLst/>
+          </a:prstGeom>
+          <a:ln w="12700">
+            <a:solidFill>
+              <a:srgbClr val="B4C7D2"/>
+            </a:solidFill>
+          </a:ln>
+          <a:effectLst/>
+        </p:spPr>
+      </p:cxnSp>
+      <p:cxnSp>
+        <p:nvCxnSpPr>
+          <p:cNvPr id="32" name="C1-E01 line 30" descr="sci-ppt:o030"/>
+          <p:cNvCxnSpPr/>
+          <p:nvPr/>
+        </p:nvCxnSpPr>
+        <p:spPr>
+          <a:xfrm>
+            <a:off x="9989819" y="1371600"/>
+            <a:ext cx="0" cy="3931920"/>
+          </a:xfrm>
+          <a:prstGeom prst="line">
+            <a:avLst/>
+          </a:prstGeom>
+          <a:ln w="7620">
+            <a:solidFill>
+              <a:srgbClr val="2E4756"/>
+            </a:solidFill>
+          </a:ln>
+          <a:effectLst/>
+        </p:spPr>
+      </p:cxnSp>
+      <p:sp>
+        <p:nvSpPr>
+          <p:cNvPr id="33" name="C1-E01 text 31" descr="sci-ppt:o031"/>
+          <p:cNvSpPr txBox="1"/>
+          <p:nvPr/>
+        </p:nvSpPr>
+        <p:spPr>
+          <a:xfrm>
+            <a:off x="9532619" y="5385816"/>
+            <a:ext cx="914400" cy="208407"/>
+          </a:xfrm>
+          <a:prstGeom prst="rect">
+            <a:avLst/>
+          </a:prstGeom>
+          <a:noFill/>
+          <a:effectLst/>
+        </p:spPr>
+        <p:txBody>
+          <a:bodyPr wrap="none" lIns="18288" rIns="18288" tIns="18288" bIns="18288" anchor="t">
+            <a:spAutoFit/>
+          </a:bodyPr>
+          <a:lstStyle/>
+          <a:p>
+            <a:pPr algn="ctr">
+              <a:spcAft>
+                <a:spcPts val="0"/>
+              </a:spcAft>
+            </a:pPr>
+            <a:r>
+              <a:rPr sz="1050" b="0" i="0">
+                <a:solidFill>
+                  <a:srgbClr val="B4C7D2"/>
+                </a:solidFill>
+                <a:latin typeface="Arial"/>
+              </a:rPr>
+              <a:t>1.2</a:t>
+            </a:r>
+          </a:p>
+        </p:txBody>
+      </p:sp>
+      <p:cxnSp>
+        <p:nvCxnSpPr>
+          <p:cNvPr id="34" name="C1-E01 line 32" descr="sci-ppt:o032"/>
+          <p:cNvCxnSpPr/>
+          <p:nvPr/>
+        </p:nvCxnSpPr>
+        <p:spPr>
+          <a:xfrm>
+            <a:off x="11430000" y="5303520"/>
+            <a:ext cx="0" cy="64008"/>
+          </a:xfrm>
+          <a:prstGeom prst="line">
+            <a:avLst/>
+          </a:prstGeom>
+          <a:ln w="12700">
+            <a:solidFill>
+              <a:srgbClr val="B4C7D2"/>
+            </a:solidFill>
+          </a:ln>
+          <a:effectLst/>
+        </p:spPr>
+      </p:cxnSp>
+      <p:cxnSp>
+        <p:nvCxnSpPr>
+          <p:cNvPr id="35" name="C1-E01 line 33" descr="sci-ppt:o033"/>
+          <p:cNvCxnSpPr/>
+          <p:nvPr/>
+        </p:nvCxnSpPr>
+        <p:spPr>
+          <a:xfrm>
+            <a:off x="11430000" y="1371600"/>
+            <a:ext cx="0" cy="3931920"/>
+          </a:xfrm>
+          <a:prstGeom prst="line">
+            <a:avLst/>
+          </a:prstGeom>
+          <a:ln w="7620">
+            <a:solidFill>
+              <a:srgbClr val="2E4756"/>
+            </a:solidFill>
+          </a:ln>
+          <a:effectLst/>
+        </p:spPr>
+      </p:cxnSp>
+      <p:sp>
+        <p:nvSpPr>
+          <p:cNvPr id="36" name="C1-E01 text 34" descr="sci-ppt:o034"/>
+          <p:cNvSpPr txBox="1"/>
+          <p:nvPr/>
+        </p:nvSpPr>
+        <p:spPr>
+          <a:xfrm>
+            <a:off x="10972800" y="5385816"/>
+            <a:ext cx="914400" cy="208407"/>
+          </a:xfrm>
+          <a:prstGeom prst="rect">
+            <a:avLst/>
+          </a:prstGeom>
+          <a:noFill/>
+          <a:effectLst/>
+        </p:spPr>
+        <p:txBody>
+          <a:bodyPr wrap="none" lIns="18288" rIns="18288" tIns="18288" bIns="18288" anchor="t">
+            <a:spAutoFit/>
+          </a:bodyPr>
+          <a:lstStyle/>
+          <a:p>
+            <a:pPr algn="ctr">
+              <a:spcAft>
+                <a:spcPts val="0"/>
+              </a:spcAft>
+            </a:pPr>
+            <a:r>
+              <a:rPr sz="1050" b="0" i="0">
+                <a:solidFill>
+                  <a:srgbClr val="B4C7D2"/>
+                </a:solidFill>
+                <a:latin typeface="Arial"/>
+              </a:rPr>
+              <a:t>1.6</a:t>
+            </a:r>
+          </a:p>
+        </p:txBody>
+      </p:sp>
+      <p:cxnSp>
+        <p:nvCxnSpPr>
+          <p:cNvPr id="37" name="C1-E01 line 35" descr="sci-ppt:o035"/>
+          <p:cNvCxnSpPr/>
+          <p:nvPr/>
+        </p:nvCxnSpPr>
+        <p:spPr>
+          <a:xfrm>
+            <a:off x="5605272" y="5303520"/>
+            <a:ext cx="64008" cy="0"/>
+          </a:xfrm>
+          <a:prstGeom prst="line">
+            <a:avLst/>
+          </a:prstGeom>
+          <a:ln w="12700">
+            <a:solidFill>
+              <a:srgbClr val="B4C7D2"/>
+            </a:solidFill>
+          </a:ln>
+          <a:effectLst/>
+        </p:spPr>
+      </p:cxnSp>
+      <p:cxnSp>
+        <p:nvCxnSpPr>
+          <p:cNvPr id="38" name="C1-E01 line 36" descr="sci-ppt:o036"/>
+          <p:cNvCxnSpPr/>
+          <p:nvPr/>
+        </p:nvCxnSpPr>
+        <p:spPr>
+          <a:xfrm>
+            <a:off x="5605272" y="3992880"/>
+            <a:ext cx="64008" cy="0"/>
+          </a:xfrm>
+          <a:prstGeom prst="line">
+            <a:avLst/>
+          </a:prstGeom>
+          <a:ln w="12700">
+            <a:solidFill>
+              <a:srgbClr val="B4C7D2"/>
+            </a:solidFill>
+          </a:ln>
+          <a:effectLst/>
+        </p:spPr>
+      </p:cxnSp>
+      <p:cxnSp>
+        <p:nvCxnSpPr>
+          <p:cNvPr id="39" name="C1-E01 line 37" descr="sci-ppt:o037"/>
+          <p:cNvCxnSpPr/>
+          <p:nvPr/>
+        </p:nvCxnSpPr>
+        <p:spPr>
+          <a:xfrm>
+            <a:off x="5669280" y="3992880"/>
+            <a:ext cx="5760720" cy="0"/>
+          </a:xfrm>
+          <a:prstGeom prst="line">
+            <a:avLst/>
+          </a:prstGeom>
+          <a:ln w="7620">
+            <a:solidFill>
+              <a:srgbClr val="2E4756"/>
+            </a:solidFill>
+          </a:ln>
+          <a:effectLst/>
+        </p:spPr>
+      </p:cxnSp>
+      <p:sp>
+        <p:nvSpPr>
+          <p:cNvPr id="40" name="C1-E01 text 38" descr="sci-ppt:o038"/>
+          <p:cNvSpPr txBox="1"/>
+          <p:nvPr/>
+        </p:nvSpPr>
+        <p:spPr>
+          <a:xfrm>
+            <a:off x="4800600" y="3910584"/>
+            <a:ext cx="777240" cy="208407"/>
+          </a:xfrm>
+          <a:prstGeom prst="rect">
+            <a:avLst/>
+          </a:prstGeom>
+          <a:noFill/>
+          <a:effectLst/>
+        </p:spPr>
+        <p:txBody>
+          <a:bodyPr wrap="none" lIns="18288" rIns="18288" tIns="18288" bIns="18288" anchor="t">
+            <a:spAutoFit/>
+          </a:bodyPr>
+          <a:lstStyle/>
+          <a:p>
+            <a:pPr algn="r">
+              <a:spcAft>
+                <a:spcPts val="0"/>
+              </a:spcAft>
+            </a:pPr>
+            <a:r>
+              <a:rPr sz="1050" b="0" i="0">
+                <a:solidFill>
+                  <a:srgbClr val="B4C7D2"/>
+                </a:solidFill>
+                <a:latin typeface="Arial"/>
+              </a:rPr>
+              <a:t>1</a:t>
+            </a:r>
+          </a:p>
+        </p:txBody>
+      </p:sp>
+      <p:cxnSp>
+        <p:nvCxnSpPr>
+          <p:cNvPr id="41" name="C1-E01 line 39" descr="sci-ppt:o039"/>
+          <p:cNvCxnSpPr/>
+          <p:nvPr/>
+        </p:nvCxnSpPr>
+        <p:spPr>
+          <a:xfrm>
+            <a:off x="5605272" y="2682240"/>
+            <a:ext cx="64008" cy="0"/>
+          </a:xfrm>
+          <a:prstGeom prst="line">
+            <a:avLst/>
+          </a:prstGeom>
+          <a:ln w="12700">
+            <a:solidFill>
+              <a:srgbClr val="B4C7D2"/>
+            </a:solidFill>
+          </a:ln>
+          <a:effectLst/>
+        </p:spPr>
+      </p:cxnSp>
+      <p:cxnSp>
+        <p:nvCxnSpPr>
+          <p:cNvPr id="42" name="C1-E01 line 40" descr="sci-ppt:o040"/>
+          <p:cNvCxnSpPr/>
+          <p:nvPr/>
+        </p:nvCxnSpPr>
+        <p:spPr>
+          <a:xfrm>
+            <a:off x="5669280" y="2682240"/>
+            <a:ext cx="5760720" cy="0"/>
+          </a:xfrm>
+          <a:prstGeom prst="line">
+            <a:avLst/>
+          </a:prstGeom>
+          <a:ln w="7620">
+            <a:solidFill>
+              <a:srgbClr val="2E4756"/>
+            </a:solidFill>
+          </a:ln>
+          <a:effectLst/>
+        </p:spPr>
+      </p:cxnSp>
+      <p:sp>
+        <p:nvSpPr>
+          <p:cNvPr id="43" name="C1-E01 text 41" descr="sci-ppt:o041"/>
+          <p:cNvSpPr txBox="1"/>
+          <p:nvPr/>
+        </p:nvSpPr>
+        <p:spPr>
+          <a:xfrm>
+            <a:off x="4800600" y="2599944"/>
+            <a:ext cx="777240" cy="208407"/>
+          </a:xfrm>
+          <a:prstGeom prst="rect">
+            <a:avLst/>
+          </a:prstGeom>
+          <a:noFill/>
+          <a:effectLst/>
+        </p:spPr>
+        <p:txBody>
+          <a:bodyPr wrap="none" lIns="18288" rIns="18288" tIns="18288" bIns="18288" anchor="t">
+            <a:spAutoFit/>
+          </a:bodyPr>
+          <a:lstStyle/>
+          <a:p>
+            <a:pPr algn="r">
+              <a:spcAft>
+                <a:spcPts val="0"/>
+              </a:spcAft>
+            </a:pPr>
+            <a:r>
+              <a:rPr sz="1050" b="0" i="0">
+                <a:solidFill>
+                  <a:srgbClr val="B4C7D2"/>
+                </a:solidFill>
+                <a:latin typeface="Arial"/>
+              </a:rPr>
+              <a:t>2</a:t>
+            </a:r>
+          </a:p>
+        </p:txBody>
+      </p:sp>
+      <p:cxnSp>
+        <p:nvCxnSpPr>
+          <p:cNvPr id="44" name="C1-E01 line 42" descr="sci-ppt:o042"/>
+          <p:cNvCxnSpPr/>
+          <p:nvPr/>
+        </p:nvCxnSpPr>
+        <p:spPr>
+          <a:xfrm>
+            <a:off x="5605272" y="1371600"/>
+            <a:ext cx="64008" cy="0"/>
+          </a:xfrm>
+          <a:prstGeom prst="line">
+            <a:avLst/>
+          </a:prstGeom>
+          <a:ln w="12700">
+            <a:solidFill>
+              <a:srgbClr val="B4C7D2"/>
+            </a:solidFill>
+          </a:ln>
+          <a:effectLst/>
+        </p:spPr>
+      </p:cxnSp>
+      <p:cxnSp>
+        <p:nvCxnSpPr>
+          <p:cNvPr id="45" name="C1-E01 line 43" descr="sci-ppt:o043"/>
+          <p:cNvCxnSpPr/>
+          <p:nvPr/>
+        </p:nvCxnSpPr>
+        <p:spPr>
+          <a:xfrm>
+            <a:off x="5669280" y="1371600"/>
+            <a:ext cx="5760720" cy="0"/>
+          </a:xfrm>
+          <a:prstGeom prst="line">
+            <a:avLst/>
+          </a:prstGeom>
+          <a:ln w="7620">
+            <a:solidFill>
+              <a:srgbClr val="2E4756"/>
+            </a:solidFill>
+          </a:ln>
+          <a:effectLst/>
+        </p:spPr>
+      </p:cxnSp>
+      <p:sp>
+        <p:nvSpPr>
+          <p:cNvPr id="46" name="C1-E01 text 44" descr="sci-ppt:o044"/>
+          <p:cNvSpPr txBox="1"/>
+          <p:nvPr/>
+        </p:nvSpPr>
+        <p:spPr>
+          <a:xfrm>
+            <a:off x="4800600" y="1289304"/>
+            <a:ext cx="777240" cy="208407"/>
+          </a:xfrm>
+          <a:prstGeom prst="rect">
+            <a:avLst/>
+          </a:prstGeom>
+          <a:noFill/>
+          <a:effectLst/>
+        </p:spPr>
+        <p:txBody>
+          <a:bodyPr wrap="none" lIns="18288" rIns="18288" tIns="18288" bIns="18288" anchor="t">
+            <a:spAutoFit/>
+          </a:bodyPr>
+          <a:lstStyle/>
+          <a:p>
+            <a:pPr algn="r">
+              <a:spcAft>
+                <a:spcPts val="0"/>
+              </a:spcAft>
+            </a:pPr>
+            <a:r>
+              <a:rPr sz="1050" b="0" i="0">
+                <a:solidFill>
+                  <a:srgbClr val="B4C7D2"/>
+                </a:solidFill>
+                <a:latin typeface="Arial"/>
+              </a:rPr>
+              <a:t>3</a:t>
+            </a:r>
+          </a:p>
+        </p:txBody>
+      </p:sp>
+      <p:sp>
+        <p:nvSpPr>
+          <p:cNvPr id="47" name="C1-E01 text 45" descr="sci-ppt:o045"/>
+          <p:cNvSpPr txBox="1"/>
+          <p:nvPr/>
+        </p:nvSpPr>
+        <p:spPr>
+          <a:xfrm>
+            <a:off x="5669280" y="5586983"/>
+            <a:ext cx="5760720" cy="231648"/>
+          </a:xfrm>
+          <a:prstGeom prst="rect">
+            <a:avLst/>
+          </a:prstGeom>
+          <a:noFill/>
+          <a:effectLst/>
+        </p:spPr>
+        <p:txBody>
+          <a:bodyPr wrap="none" lIns="18288" rIns="18288" tIns="18288" bIns="18288" anchor="t">
+            <a:spAutoFit/>
+          </a:bodyPr>
+          <a:lstStyle/>
+          <a:p>
+            <a:pPr algn="ctr">
+              <a:spcAft>
+                <a:spcPts val="0"/>
+              </a:spcAft>
+            </a:pPr>
+            <a:r>
+              <a:rPr sz="1200" b="0" i="0">
+                <a:solidFill>
+                  <a:srgbClr val="E7F0F3"/>
+                </a:solidFill>
+                <a:latin typeface="Arial"/>
+              </a:rPr>
+              <a:t>t  (µs)</a:t>
+            </a:r>
+          </a:p>
+        </p:txBody>
+      </p:sp>
+      <p:sp>
+        <p:nvSpPr>
+          <p:cNvPr id="48" name="C1-E01 text 46" descr="sci-ppt:o046"/>
+          <p:cNvSpPr txBox="1"/>
+          <p:nvPr/>
+        </p:nvSpPr>
+        <p:spPr>
+          <a:xfrm>
+            <a:off x="5120640" y="1024128"/>
+            <a:ext cx="5760720" cy="231648"/>
+          </a:xfrm>
+          <a:prstGeom prst="rect">
+            <a:avLst/>
+          </a:prstGeom>
+          <a:noFill/>
+          <a:effectLst/>
+        </p:spPr>
+        <p:txBody>
+          <a:bodyPr wrap="none" lIns="18288" rIns="18288" tIns="18288" bIns="18288" anchor="t">
             <a:spAutoFit/>
           </a:bodyPr>
           <a:lstStyle/>
@@ -3261,27 +4485,573 @@
               </a:spcAft>
             </a:pPr>
             <a:r>
-              <a:rPr sz="1920" b="0" i="0">
+              <a:rPr sz="1200" b="0" i="0">
                 <a:solidFill>
                   <a:srgbClr val="E7F0F3"/>
                 </a:solidFill>
                 <a:latin typeface="Arial"/>
               </a:rPr>
-              <a:t>p_b</a:t>
-            </a:r>
-          </a:p>
-        </p:txBody>
-      </p:sp>
-      <p:sp>
-        <p:nvSpPr>
-          <p:cNvPr id="7" name="text6" descr="sci-ppt:C1-E01-006"/>
+              <a:t>R(t) / R₀</a:t>
+            </a:r>
+          </a:p>
+        </p:txBody>
+      </p:sp>
+      <p:sp>
+        <p:nvSpPr>
+          <p:cNvPr id="49" name="C1-E01 polygon 47" descr="sci-ppt:o047"/>
+          <p:cNvSpPr/>
+          <p:nvPr/>
+        </p:nvSpPr>
+        <p:spPr>
+          <a:xfrm>
+            <a:off x="5669280" y="2239673"/>
+            <a:ext cx="5760720" cy="1753207"/>
+          </a:xfrm>
+          <a:custGeom>
+            <a:avLst/>
+            <a:gdLst/>
+            <a:ahLst/>
+            <a:cxnLst/>
+            <a:rect l="l" t="t" r="r" b="b"/>
+            <a:pathLst>
+              <a:path w="5760720" h="1753207">
+                <a:moveTo>
+                  <a:pt x="0" y="1753207"/>
+                </a:moveTo>
+                <a:lnTo>
+                  <a:pt x="38430" y="1723812"/>
+                </a:lnTo>
+                <a:lnTo>
+                  <a:pt x="76860" y="1692015"/>
+                </a:lnTo>
+                <a:lnTo>
+                  <a:pt x="115291" y="1658404"/>
+                </a:lnTo>
+                <a:lnTo>
+                  <a:pt x="153721" y="1623487"/>
+                </a:lnTo>
+                <a:lnTo>
+                  <a:pt x="192152" y="1587689"/>
+                </a:lnTo>
+                <a:lnTo>
+                  <a:pt x="230582" y="1551357"/>
+                </a:lnTo>
+                <a:lnTo>
+                  <a:pt x="269012" y="1514773"/>
+                </a:lnTo>
+                <a:lnTo>
+                  <a:pt x="307443" y="1478162"/>
+                </a:lnTo>
+                <a:lnTo>
+                  <a:pt x="345873" y="1441697"/>
+                </a:lnTo>
+                <a:lnTo>
+                  <a:pt x="384304" y="1405517"/>
+                </a:lnTo>
+                <a:lnTo>
+                  <a:pt x="422734" y="1369725"/>
+                </a:lnTo>
+                <a:lnTo>
+                  <a:pt x="461165" y="1334401"/>
+                </a:lnTo>
+                <a:lnTo>
+                  <a:pt x="499595" y="1299604"/>
+                </a:lnTo>
+                <a:lnTo>
+                  <a:pt x="538025" y="1265378"/>
+                </a:lnTo>
+                <a:lnTo>
+                  <a:pt x="576456" y="1231752"/>
+                </a:lnTo>
+                <a:lnTo>
+                  <a:pt x="614886" y="1198748"/>
+                </a:lnTo>
+                <a:lnTo>
+                  <a:pt x="653317" y="1166377"/>
+                </a:lnTo>
+                <a:lnTo>
+                  <a:pt x="691747" y="1134646"/>
+                </a:lnTo>
+                <a:lnTo>
+                  <a:pt x="730177" y="1103557"/>
+                </a:lnTo>
+                <a:lnTo>
+                  <a:pt x="768608" y="1073109"/>
+                </a:lnTo>
+                <a:lnTo>
+                  <a:pt x="807038" y="1043296"/>
+                </a:lnTo>
+                <a:lnTo>
+                  <a:pt x="845469" y="1014111"/>
+                </a:lnTo>
+                <a:lnTo>
+                  <a:pt x="883899" y="985547"/>
+                </a:lnTo>
+                <a:lnTo>
+                  <a:pt x="922330" y="957594"/>
+                </a:lnTo>
+                <a:lnTo>
+                  <a:pt x="960760" y="930242"/>
+                </a:lnTo>
+                <a:lnTo>
+                  <a:pt x="999190" y="903479"/>
+                </a:lnTo>
+                <a:lnTo>
+                  <a:pt x="1037621" y="877294"/>
+                </a:lnTo>
+                <a:lnTo>
+                  <a:pt x="1076051" y="851676"/>
+                </a:lnTo>
+                <a:lnTo>
+                  <a:pt x="1114482" y="826614"/>
+                </a:lnTo>
+                <a:lnTo>
+                  <a:pt x="1152912" y="802095"/>
+                </a:lnTo>
+                <a:lnTo>
+                  <a:pt x="1191343" y="778109"/>
+                </a:lnTo>
+                <a:lnTo>
+                  <a:pt x="1229773" y="754644"/>
+                </a:lnTo>
+                <a:lnTo>
+                  <a:pt x="1268203" y="731689"/>
+                </a:lnTo>
+                <a:lnTo>
+                  <a:pt x="1306634" y="709234"/>
+                </a:lnTo>
+                <a:lnTo>
+                  <a:pt x="1345064" y="687268"/>
+                </a:lnTo>
+                <a:lnTo>
+                  <a:pt x="1383495" y="665781"/>
+                </a:lnTo>
+                <a:lnTo>
+                  <a:pt x="1421925" y="644763"/>
+                </a:lnTo>
+                <a:lnTo>
+                  <a:pt x="1460355" y="624204"/>
+                </a:lnTo>
+                <a:lnTo>
+                  <a:pt x="1498786" y="604095"/>
+                </a:lnTo>
+                <a:lnTo>
+                  <a:pt x="1537216" y="584428"/>
+                </a:lnTo>
+                <a:lnTo>
+                  <a:pt x="1575647" y="565193"/>
+                </a:lnTo>
+                <a:lnTo>
+                  <a:pt x="1614077" y="546383"/>
+                </a:lnTo>
+                <a:lnTo>
+                  <a:pt x="1652508" y="527988"/>
+                </a:lnTo>
+                <a:lnTo>
+                  <a:pt x="1690938" y="510002"/>
+                </a:lnTo>
+                <a:lnTo>
+                  <a:pt x="1729368" y="492416"/>
+                </a:lnTo>
+                <a:lnTo>
+                  <a:pt x="1767799" y="475225"/>
+                </a:lnTo>
+                <a:lnTo>
+                  <a:pt x="1806229" y="458419"/>
+                </a:lnTo>
+                <a:lnTo>
+                  <a:pt x="1844660" y="441994"/>
+                </a:lnTo>
+                <a:lnTo>
+                  <a:pt x="1883090" y="425942"/>
+                </a:lnTo>
+                <a:lnTo>
+                  <a:pt x="1921521" y="410258"/>
+                </a:lnTo>
+                <a:lnTo>
+                  <a:pt x="1959951" y="394934"/>
+                </a:lnTo>
+                <a:lnTo>
+                  <a:pt x="1998381" y="379967"/>
+                </a:lnTo>
+                <a:lnTo>
+                  <a:pt x="2036812" y="365349"/>
+                </a:lnTo>
+                <a:lnTo>
+                  <a:pt x="2075242" y="351075"/>
+                </a:lnTo>
+                <a:lnTo>
+                  <a:pt x="2113673" y="337141"/>
+                </a:lnTo>
+                <a:lnTo>
+                  <a:pt x="2152103" y="323542"/>
+                </a:lnTo>
+                <a:lnTo>
+                  <a:pt x="2190533" y="310272"/>
+                </a:lnTo>
+                <a:lnTo>
+                  <a:pt x="2228964" y="297327"/>
+                </a:lnTo>
+                <a:lnTo>
+                  <a:pt x="2267394" y="284703"/>
+                </a:lnTo>
+                <a:lnTo>
+                  <a:pt x="2305825" y="272395"/>
+                </a:lnTo>
+                <a:lnTo>
+                  <a:pt x="2344255" y="260400"/>
+                </a:lnTo>
+                <a:lnTo>
+                  <a:pt x="2382686" y="248713"/>
+                </a:lnTo>
+                <a:lnTo>
+                  <a:pt x="2421116" y="237330"/>
+                </a:lnTo>
+                <a:lnTo>
+                  <a:pt x="2459546" y="226248"/>
+                </a:lnTo>
+                <a:lnTo>
+                  <a:pt x="2497977" y="215464"/>
+                </a:lnTo>
+                <a:lnTo>
+                  <a:pt x="2536407" y="204973"/>
+                </a:lnTo>
+                <a:lnTo>
+                  <a:pt x="2574838" y="194774"/>
+                </a:lnTo>
+                <a:lnTo>
+                  <a:pt x="2613268" y="184861"/>
+                </a:lnTo>
+                <a:lnTo>
+                  <a:pt x="2651698" y="175234"/>
+                </a:lnTo>
+                <a:lnTo>
+                  <a:pt x="2690129" y="165887"/>
+                </a:lnTo>
+                <a:lnTo>
+                  <a:pt x="2728559" y="156820"/>
+                </a:lnTo>
+                <a:lnTo>
+                  <a:pt x="2766990" y="148029"/>
+                </a:lnTo>
+                <a:lnTo>
+                  <a:pt x="2805420" y="139512"/>
+                </a:lnTo>
+                <a:lnTo>
+                  <a:pt x="2843851" y="131265"/>
+                </a:lnTo>
+                <a:lnTo>
+                  <a:pt x="2882281" y="123288"/>
+                </a:lnTo>
+                <a:lnTo>
+                  <a:pt x="2920711" y="115576"/>
+                </a:lnTo>
+                <a:lnTo>
+                  <a:pt x="2959142" y="108129"/>
+                </a:lnTo>
+                <a:lnTo>
+                  <a:pt x="2997572" y="100945"/>
+                </a:lnTo>
+                <a:lnTo>
+                  <a:pt x="3036003" y="94020"/>
+                </a:lnTo>
+                <a:lnTo>
+                  <a:pt x="3074433" y="87354"/>
+                </a:lnTo>
+                <a:lnTo>
+                  <a:pt x="3112864" y="80944"/>
+                </a:lnTo>
+                <a:lnTo>
+                  <a:pt x="3151294" y="74789"/>
+                </a:lnTo>
+                <a:lnTo>
+                  <a:pt x="3189724" y="68887"/>
+                </a:lnTo>
+                <a:lnTo>
+                  <a:pt x="3228155" y="63236"/>
+                </a:lnTo>
+                <a:lnTo>
+                  <a:pt x="3266585" y="57835"/>
+                </a:lnTo>
+                <a:lnTo>
+                  <a:pt x="3305016" y="52682"/>
+                </a:lnTo>
+                <a:lnTo>
+                  <a:pt x="3343446" y="47777"/>
+                </a:lnTo>
+                <a:lnTo>
+                  <a:pt x="3381876" y="43117"/>
+                </a:lnTo>
+                <a:lnTo>
+                  <a:pt x="3420307" y="38701"/>
+                </a:lnTo>
+                <a:lnTo>
+                  <a:pt x="3458737" y="34529"/>
+                </a:lnTo>
+                <a:lnTo>
+                  <a:pt x="3497168" y="30600"/>
+                </a:lnTo>
+                <a:lnTo>
+                  <a:pt x="3535598" y="26911"/>
+                </a:lnTo>
+                <a:lnTo>
+                  <a:pt x="3574029" y="23463"/>
+                </a:lnTo>
+                <a:lnTo>
+                  <a:pt x="3612459" y="20253"/>
+                </a:lnTo>
+                <a:lnTo>
+                  <a:pt x="3650889" y="17283"/>
+                </a:lnTo>
+                <a:lnTo>
+                  <a:pt x="3689320" y="14549"/>
+                </a:lnTo>
+                <a:lnTo>
+                  <a:pt x="3727750" y="12053"/>
+                </a:lnTo>
+                <a:lnTo>
+                  <a:pt x="3766181" y="9793"/>
+                </a:lnTo>
+                <a:lnTo>
+                  <a:pt x="3804611" y="7769"/>
+                </a:lnTo>
+                <a:lnTo>
+                  <a:pt x="3843042" y="5979"/>
+                </a:lnTo>
+                <a:lnTo>
+                  <a:pt x="3881472" y="4424"/>
+                </a:lnTo>
+                <a:lnTo>
+                  <a:pt x="3919902" y="3104"/>
+                </a:lnTo>
+                <a:lnTo>
+                  <a:pt x="3958333" y="2017"/>
+                </a:lnTo>
+                <a:lnTo>
+                  <a:pt x="3996763" y="1163"/>
+                </a:lnTo>
+                <a:lnTo>
+                  <a:pt x="4035194" y="543"/>
+                </a:lnTo>
+                <a:lnTo>
+                  <a:pt x="4073624" y="155"/>
+                </a:lnTo>
+                <a:lnTo>
+                  <a:pt x="4112054" y="0"/>
+                </a:lnTo>
+                <a:lnTo>
+                  <a:pt x="4150485" y="78"/>
+                </a:lnTo>
+                <a:lnTo>
+                  <a:pt x="4188915" y="388"/>
+                </a:lnTo>
+                <a:lnTo>
+                  <a:pt x="4227346" y="931"/>
+                </a:lnTo>
+                <a:lnTo>
+                  <a:pt x="4265776" y="1707"/>
+                </a:lnTo>
+                <a:lnTo>
+                  <a:pt x="4304207" y="2715"/>
+                </a:lnTo>
+                <a:lnTo>
+                  <a:pt x="4342637" y="3956"/>
+                </a:lnTo>
+                <a:lnTo>
+                  <a:pt x="4381067" y="5430"/>
+                </a:lnTo>
+                <a:lnTo>
+                  <a:pt x="4419498" y="7138"/>
+                </a:lnTo>
+                <a:lnTo>
+                  <a:pt x="4457928" y="9080"/>
+                </a:lnTo>
+                <a:lnTo>
+                  <a:pt x="4496359" y="11255"/>
+                </a:lnTo>
+                <a:lnTo>
+                  <a:pt x="4534789" y="13665"/>
+                </a:lnTo>
+                <a:lnTo>
+                  <a:pt x="4573220" y="16310"/>
+                </a:lnTo>
+                <a:lnTo>
+                  <a:pt x="4611650" y="19191"/>
+                </a:lnTo>
+                <a:lnTo>
+                  <a:pt x="4650080" y="22308"/>
+                </a:lnTo>
+                <a:lnTo>
+                  <a:pt x="4688511" y="25662"/>
+                </a:lnTo>
+                <a:lnTo>
+                  <a:pt x="4726941" y="29253"/>
+                </a:lnTo>
+                <a:lnTo>
+                  <a:pt x="4765372" y="33083"/>
+                </a:lnTo>
+                <a:lnTo>
+                  <a:pt x="4803802" y="37152"/>
+                </a:lnTo>
+                <a:lnTo>
+                  <a:pt x="4842232" y="41461"/>
+                </a:lnTo>
+                <a:lnTo>
+                  <a:pt x="4880663" y="46011"/>
+                </a:lnTo>
+                <a:lnTo>
+                  <a:pt x="4919093" y="50804"/>
+                </a:lnTo>
+                <a:lnTo>
+                  <a:pt x="4957524" y="55840"/>
+                </a:lnTo>
+                <a:lnTo>
+                  <a:pt x="4995954" y="61120"/>
+                </a:lnTo>
+                <a:lnTo>
+                  <a:pt x="5034385" y="66645"/>
+                </a:lnTo>
+                <a:lnTo>
+                  <a:pt x="5072815" y="72418"/>
+                </a:lnTo>
+                <a:lnTo>
+                  <a:pt x="5111245" y="78439"/>
+                </a:lnTo>
+                <a:lnTo>
+                  <a:pt x="5149676" y="84709"/>
+                </a:lnTo>
+                <a:lnTo>
+                  <a:pt x="5188106" y="91231"/>
+                </a:lnTo>
+                <a:lnTo>
+                  <a:pt x="5226537" y="98006"/>
+                </a:lnTo>
+                <a:lnTo>
+                  <a:pt x="5264967" y="105035"/>
+                </a:lnTo>
+                <a:lnTo>
+                  <a:pt x="5303397" y="112320"/>
+                </a:lnTo>
+                <a:lnTo>
+                  <a:pt x="5341828" y="119863"/>
+                </a:lnTo>
+                <a:lnTo>
+                  <a:pt x="5380258" y="127666"/>
+                </a:lnTo>
+                <a:lnTo>
+                  <a:pt x="5418689" y="135731"/>
+                </a:lnTo>
+                <a:lnTo>
+                  <a:pt x="5457119" y="144060"/>
+                </a:lnTo>
+                <a:lnTo>
+                  <a:pt x="5495550" y="152655"/>
+                </a:lnTo>
+                <a:lnTo>
+                  <a:pt x="5533980" y="161517"/>
+                </a:lnTo>
+                <a:lnTo>
+                  <a:pt x="5572410" y="170651"/>
+                </a:lnTo>
+                <a:lnTo>
+                  <a:pt x="5610841" y="180057"/>
+                </a:lnTo>
+                <a:lnTo>
+                  <a:pt x="5649271" y="189739"/>
+                </a:lnTo>
+                <a:lnTo>
+                  <a:pt x="5687702" y="199699"/>
+                </a:lnTo>
+                <a:lnTo>
+                  <a:pt x="5726132" y="209940"/>
+                </a:lnTo>
+                <a:lnTo>
+                  <a:pt x="5760720" y="219399"/>
+                </a:lnTo>
+              </a:path>
+            </a:pathLst>
+          </a:custGeom>
+          <a:noFill/>
+          <a:ln w="35560">
+            <a:solidFill>
+              <a:srgbClr val="8EDBD4"/>
+            </a:solidFill>
+          </a:ln>
+          <a:effectLst/>
+        </p:spPr>
+        <p:txBody>
+          <a:bodyPr rtlCol="0" anchor="ctr"/>
+          <a:lstStyle/>
+          <a:p>
+            <a:pPr algn="ctr"/>
+          </a:p>
+        </p:txBody>
+      </p:sp>
+      <p:sp>
+        <p:nvSpPr>
+          <p:cNvPr id="50" name="C1-E01 ellipse 48" descr="sci-ppt:o048"/>
+          <p:cNvSpPr/>
+          <p:nvPr/>
+        </p:nvSpPr>
+        <p:spPr>
+          <a:xfrm>
+            <a:off x="5596128" y="3919728"/>
+            <a:ext cx="146304" cy="146304"/>
+          </a:xfrm>
+          <a:prstGeom prst="ellipse">
+            <a:avLst/>
+          </a:prstGeom>
+          <a:solidFill>
+            <a:srgbClr val="F2B880"/>
+          </a:solidFill>
+          <a:ln w="12700">
+            <a:solidFill>
+              <a:srgbClr val="F2B880"/>
+            </a:solidFill>
+          </a:ln>
+          <a:effectLst/>
+        </p:spPr>
+        <p:txBody>
+          <a:bodyPr rtlCol="0" anchor="ctr"/>
+          <a:lstStyle/>
+          <a:p>
+            <a:pPr algn="ctr"/>
+          </a:p>
+        </p:txBody>
+      </p:sp>
+      <p:cxnSp>
+        <p:nvCxnSpPr>
+          <p:cNvPr id="51" name="C1-E01 line 49" descr="sci-ppt:o049"/>
+          <p:cNvCxnSpPr/>
+          <p:nvPr/>
+        </p:nvCxnSpPr>
+        <p:spPr>
+          <a:xfrm flipV="1">
+            <a:off x="5669280" y="2420112"/>
+            <a:ext cx="2160270" cy="1572768"/>
+          </a:xfrm>
+          <a:prstGeom prst="line">
+            <a:avLst/>
+          </a:prstGeom>
+          <a:ln w="22860">
+            <a:solidFill>
+              <a:srgbClr val="F2B880"/>
+            </a:solidFill>
+            <a:prstDash val="dash"/>
+          </a:ln>
+          <a:effectLst/>
+        </p:spPr>
+      </p:cxnSp>
+      <p:sp>
+        <p:nvSpPr>
+          <p:cNvPr id="52" name="C1-E01 text 50" descr="sci-ppt:o050"/>
           <p:cNvSpPr txBox="1"/>
           <p:nvPr/>
         </p:nvSpPr>
         <p:spPr>
           <a:xfrm>
-            <a:off x="5242560" y="1524000"/>
-            <a:ext cx="4876800" cy="415747"/>
+            <a:off x="5986462" y="4102608"/>
+            <a:ext cx="3108960" cy="239395"/>
           </a:xfrm>
           <a:prstGeom prst="rect">
             <a:avLst/>
@@ -3290,7 +5060,7 @@
           <a:effectLst/>
         </p:spPr>
         <p:txBody>
-          <a:bodyPr wrap="none" lIns="27432" rIns="27432" tIns="18288" bIns="18288" anchor="ctr">
+          <a:bodyPr wrap="none" lIns="18288" rIns="18288" tIns="18288" bIns="18288" anchor="t">
             <a:spAutoFit/>
           </a:bodyPr>
           <a:lstStyle/>
@@ -3301,39 +5071,95 @@
               </a:spcAft>
             </a:pPr>
             <a:r>
-              <a:rPr sz="2111" b="0" i="0">
+              <a:rPr sz="1250" b="0" i="0">
+                <a:solidFill>
+                  <a:srgbClr val="F2B880"/>
+                </a:solidFill>
+                <a:latin typeface="Arial"/>
+              </a:rPr>
+              <a:t>start: R₀ and slope Ṙ(0) = U₀</a:t>
+            </a:r>
+          </a:p>
+        </p:txBody>
+      </p:sp>
+      <p:sp>
+        <p:nvSpPr>
+          <p:cNvPr id="53" name="C1-E01 text 51" descr="sci-ppt:o051"/>
+          <p:cNvSpPr txBox="1"/>
+          <p:nvPr/>
+        </p:nvSpPr>
+        <p:spPr>
+          <a:xfrm>
+            <a:off x="8982837" y="3049523"/>
+            <a:ext cx="2011680" cy="239395"/>
+          </a:xfrm>
+          <a:prstGeom prst="rect">
+            <a:avLst/>
+          </a:prstGeom>
+          <a:noFill/>
+          <a:effectLst/>
+        </p:spPr>
+        <p:txBody>
+          <a:bodyPr wrap="none" lIns="18288" rIns="18288" tIns="18288" bIns="18288" anchor="t">
+            <a:spAutoFit/>
+          </a:bodyPr>
+          <a:lstStyle/>
+          <a:p>
+            <a:pPr algn="l">
+              <a:spcAft>
+                <a:spcPts val="0"/>
+              </a:spcAft>
+            </a:pPr>
+            <a:r>
+              <a:rPr sz="1250" b="0" i="0">
+                <a:solidFill>
+                  <a:srgbClr val="8EDBD4"/>
+                </a:solidFill>
+                <a:latin typeface="Arial"/>
+              </a:rPr>
+              <a:t>R(t) afterwards</a:t>
+            </a:r>
+          </a:p>
+        </p:txBody>
+      </p:sp>
+      <p:sp>
+        <p:nvSpPr>
+          <p:cNvPr id="54" name="C1-E01 text 52" descr="sci-ppt:o052"/>
+          <p:cNvSpPr txBox="1"/>
+          <p:nvPr/>
+        </p:nvSpPr>
+        <p:spPr>
+          <a:xfrm>
+            <a:off x="5669280" y="5897880"/>
+            <a:ext cx="5943600" cy="448563"/>
+          </a:xfrm>
+          <a:prstGeom prst="rect">
+            <a:avLst/>
+          </a:prstGeom>
+          <a:noFill/>
+          <a:effectLst/>
+        </p:spPr>
+        <p:txBody>
+          <a:bodyPr wrap="none" lIns="18288" rIns="18288" tIns="18288" bIns="18288" anchor="t">
+            <a:spAutoFit/>
+          </a:bodyPr>
+          <a:lstStyle/>
+          <a:p>
+            <a:pPr algn="l">
+              <a:spcAft>
+                <a:spcPts val="0"/>
+              </a:spcAft>
+            </a:pPr>
+            <a:r>
+              <a:rPr sz="1300" b="0" i="0">
                 <a:solidFill>
                   <a:srgbClr val="E7F0F3"/>
                 </a:solidFill>
                 <a:latin typeface="Arial"/>
               </a:rPr>
-              <a:t>Surrounding liquid</a:t>
-            </a:r>
-          </a:p>
-        </p:txBody>
-      </p:sp>
-      <p:sp>
-        <p:nvSpPr>
-          <p:cNvPr id="8" name="text7" descr="sci-ppt:C1-E01-007"/>
-          <p:cNvSpPr txBox="1"/>
-          <p:nvPr/>
-        </p:nvSpPr>
-        <p:spPr>
-          <a:xfrm>
-            <a:off x="5242560" y="1987296"/>
-            <a:ext cx="5852160" cy="359054"/>
-          </a:xfrm>
-          <a:prstGeom prst="rect">
-            <a:avLst/>
-          </a:prstGeom>
-          <a:noFill/>
-          <a:effectLst/>
-        </p:spPr>
-        <p:txBody>
-          <a:bodyPr wrap="none" lIns="27432" rIns="27432" tIns="18288" bIns="18288" anchor="ctr">
-            <a:spAutoFit/>
-          </a:bodyPr>
-          <a:lstStyle/>
+              <a:t>Both initial values and the far-field pressure p∞(t) are inputs,</a:t>
+            </a:r>
+          </a:p>
           <a:p>
             <a:pPr algn="l">
               <a:spcAft>
@@ -3341,51 +5167,27 @@
               </a:spcAft>
             </a:pPr>
             <a:r>
-              <a:rPr sz="1823" b="0" i="0">
+              <a:rPr sz="1300" b="0" i="0">
                 <a:solidFill>
                   <a:srgbClr val="E7F0F3"/>
                 </a:solidFill>
                 <a:latin typeface="Arial"/>
               </a:rPr>
-              <a:t>p∞, ρ, μ; interface: σ</a:t>
-            </a:r>
-          </a:p>
-        </p:txBody>
-      </p:sp>
-      <p:cxnSp>
-        <p:nvCxnSpPr>
-          <p:cNvPr id="9" name="arrow8" descr="sci-ppt:C1-E01-008"/>
-          <p:cNvCxnSpPr/>
-          <p:nvPr/>
-        </p:nvCxnSpPr>
-        <p:spPr>
-          <a:xfrm>
-            <a:off x="3291840" y="2621280"/>
-            <a:ext cx="1706880" cy="1158240"/>
-          </a:xfrm>
-          <a:prstGeom prst="line">
-            <a:avLst/>
-          </a:prstGeom>
-          <a:ln w="25400">
-            <a:solidFill>
-              <a:srgbClr val="8EDBD4"/>
-            </a:solidFill>
-            <a:headEnd type="none" w="med" len="med"/>
-            <a:tailEnd type="triangle" w="med" len="med"/>
-          </a:ln>
-          <a:effectLst/>
-        </p:spPr>
-      </p:cxnSp>
-      <p:sp>
-        <p:nvSpPr>
-          <p:cNvPr id="10" name="text9" descr="sci-ppt:C1-E01-009"/>
+              <a:t>not results.</a:t>
+            </a:r>
+          </a:p>
+        </p:txBody>
+      </p:sp>
+      <p:sp>
+        <p:nvSpPr>
+          <p:cNvPr id="55" name="C1-E01 text 53" descr="sci-ppt:o053"/>
           <p:cNvSpPr txBox="1"/>
           <p:nvPr/>
         </p:nvSpPr>
         <p:spPr>
           <a:xfrm>
-            <a:off x="5364480" y="3657600"/>
-            <a:ext cx="1950720" cy="340156"/>
+            <a:off x="320040" y="6510528"/>
+            <a:ext cx="11521440" cy="200660"/>
           </a:xfrm>
           <a:prstGeom prst="rect">
             <a:avLst/>
@@ -3394,7 +5196,7 @@
           <a:effectLst/>
         </p:spPr>
         <p:txBody>
-          <a:bodyPr wrap="none" lIns="27432" rIns="27432" tIns="18288" bIns="18288" anchor="ctr">
+          <a:bodyPr wrap="none" lIns="18288" rIns="18288" tIns="18288" bIns="18288" anchor="t">
             <a:spAutoFit/>
           </a:bodyPr>
           <a:lstStyle/>
@@ -3405,477 +5207,13 @@
               </a:spcAft>
             </a:pPr>
             <a:r>
-              <a:rPr sz="1728" b="0" i="0">
-                <a:solidFill>
-                  <a:srgbClr val="E7F0F3"/>
-                </a:solidFill>
-                <a:latin typeface="Arial"/>
-              </a:rPr>
-              <a:t>r ≥ R</a:t>
-            </a:r>
-          </a:p>
-        </p:txBody>
-      </p:sp>
-      <p:cxnSp>
-        <p:nvCxnSpPr>
-          <p:cNvPr id="11" name="arrow10" descr="sci-ppt:C1-E01-010"/>
-          <p:cNvCxnSpPr/>
-          <p:nvPr/>
-        </p:nvCxnSpPr>
-        <p:spPr>
-          <a:xfrm>
-            <a:off x="4998720" y="2621280"/>
-            <a:ext cx="792480" cy="0"/>
-          </a:xfrm>
-          <a:prstGeom prst="line">
-            <a:avLst/>
-          </a:prstGeom>
-          <a:ln w="25400">
-            <a:solidFill>
-              <a:srgbClr val="8EDBD4"/>
-            </a:solidFill>
-            <a:headEnd type="none" w="med" len="med"/>
-            <a:tailEnd type="triangle" w="med" len="med"/>
-          </a:ln>
-          <a:effectLst/>
-        </p:spPr>
-      </p:cxnSp>
-      <p:sp>
-        <p:nvSpPr>
-          <p:cNvPr id="12" name="text11" descr="sci-ppt:C1-E01-011"/>
-          <p:cNvSpPr txBox="1"/>
-          <p:nvPr/>
-        </p:nvSpPr>
-        <p:spPr>
-          <a:xfrm>
-            <a:off x="5059680" y="2865120"/>
-            <a:ext cx="3291840" cy="321259"/>
-          </a:xfrm>
-          <a:prstGeom prst="rect">
-            <a:avLst/>
-          </a:prstGeom>
-          <a:noFill/>
-          <a:effectLst/>
-        </p:spPr>
-        <p:txBody>
-          <a:bodyPr wrap="none" lIns="27432" rIns="27432" tIns="18288" bIns="18288" anchor="ctr">
-            <a:spAutoFit/>
-          </a:bodyPr>
-          <a:lstStyle/>
-          <a:p>
-            <a:pPr algn="l">
-              <a:spcAft>
-                <a:spcPts val="0"/>
-              </a:spcAft>
-            </a:pPr>
-            <a:r>
-              <a:rPr sz="1632" b="0" i="0">
-                <a:solidFill>
-                  <a:srgbClr val="E7F0F3"/>
-                </a:solidFill>
-                <a:latin typeface="Arial"/>
-              </a:rPr>
-              <a:t>+e_r (coordinate)</a:t>
-            </a:r>
-          </a:p>
-        </p:txBody>
-      </p:sp>
-      <p:sp>
-        <p:nvSpPr>
-          <p:cNvPr id="13" name="text12" descr="sci-ppt:C1-E01-012"/>
-          <p:cNvSpPr txBox="1"/>
-          <p:nvPr/>
-        </p:nvSpPr>
-        <p:spPr>
-          <a:xfrm>
-            <a:off x="1219200" y="4206240"/>
-            <a:ext cx="9753600" cy="340156"/>
-          </a:xfrm>
-          <a:prstGeom prst="rect">
-            <a:avLst/>
-          </a:prstGeom>
-          <a:noFill/>
-          <a:effectLst/>
-        </p:spPr>
-        <p:txBody>
-          <a:bodyPr wrap="none" lIns="27432" rIns="27432" tIns="18288" bIns="18288" anchor="ctr">
-            <a:spAutoFit/>
-          </a:bodyPr>
-          <a:lstStyle/>
-          <a:p>
-            <a:pPr algn="l">
-              <a:spcAft>
-                <a:spcPts val="0"/>
-              </a:spcAft>
-            </a:pPr>
-            <a:r>
-              <a:rPr sz="1728" b="0" i="0">
-                <a:solidFill>
-                  <a:srgbClr val="E7F0F3"/>
-                </a:solidFill>
-                <a:latin typeface="Arial"/>
-              </a:rPr>
-              <a:t>Signed wall speed: Ṙ; acceleration: R̈</a:t>
-            </a:r>
-          </a:p>
-        </p:txBody>
-      </p:sp>
-      <p:sp>
-        <p:nvSpPr>
-          <p:cNvPr id="14" name="text13" descr="sci-ppt:C1-E01-013"/>
-          <p:cNvSpPr txBox="1"/>
-          <p:nvPr/>
-        </p:nvSpPr>
-        <p:spPr>
-          <a:xfrm>
-            <a:off x="365760" y="4974336"/>
-            <a:ext cx="5547360" cy="321259"/>
-          </a:xfrm>
-          <a:prstGeom prst="rect">
-            <a:avLst/>
-          </a:prstGeom>
-          <a:noFill/>
-          <a:effectLst/>
-        </p:spPr>
-        <p:txBody>
-          <a:bodyPr wrap="none" lIns="27432" rIns="27432" tIns="18288" bIns="18288" anchor="ctr">
-            <a:spAutoFit/>
-          </a:bodyPr>
-          <a:lstStyle/>
-          <a:p>
-            <a:pPr algn="l">
-              <a:spcAft>
-                <a:spcPts val="0"/>
-              </a:spcAft>
-            </a:pPr>
-            <a:r>
-              <a:rPr sz="1632" b="0" i="0">
-                <a:solidFill>
-                  <a:srgbClr val="E7F0F3"/>
-                </a:solidFill>
-                <a:latin typeface="Arial"/>
-              </a:rPr>
-              <a:t>R(t)</a:t>
-            </a:r>
-          </a:p>
-        </p:txBody>
-      </p:sp>
-      <p:sp>
-        <p:nvSpPr>
-          <p:cNvPr id="15" name="text14" descr="sci-ppt:C1-E01-014"/>
-          <p:cNvSpPr txBox="1"/>
-          <p:nvPr/>
-        </p:nvSpPr>
-        <p:spPr>
-          <a:xfrm>
-            <a:off x="365760" y="5266944"/>
-            <a:ext cx="5547360" cy="321259"/>
-          </a:xfrm>
-          <a:prstGeom prst="rect">
-            <a:avLst/>
-          </a:prstGeom>
-          <a:noFill/>
-          <a:effectLst/>
-        </p:spPr>
-        <p:txBody>
-          <a:bodyPr wrap="none" lIns="27432" rIns="27432" tIns="18288" bIns="18288" anchor="ctr">
-            <a:spAutoFit/>
-          </a:bodyPr>
-          <a:lstStyle/>
-          <a:p>
-            <a:pPr algn="l">
-              <a:spcAft>
-                <a:spcPts val="0"/>
-              </a:spcAft>
-            </a:pPr>
-            <a:r>
-              <a:rPr sz="1632" b="0" i="0">
-                <a:solidFill>
-                  <a:srgbClr val="E7F0F3"/>
-                </a:solidFill>
-                <a:latin typeface="Arial"/>
-              </a:rPr>
-              <a:t>Ṙ(0) = U₀</a:t>
-            </a:r>
-          </a:p>
-        </p:txBody>
-      </p:sp>
-      <p:sp>
-        <p:nvSpPr>
-          <p:cNvPr id="16" name="text15" descr="sci-ppt:C1-E01-015"/>
-          <p:cNvSpPr txBox="1"/>
-          <p:nvPr/>
-        </p:nvSpPr>
-        <p:spPr>
-          <a:xfrm>
-            <a:off x="365760" y="5559552"/>
-            <a:ext cx="5547360" cy="321259"/>
-          </a:xfrm>
-          <a:prstGeom prst="rect">
-            <a:avLst/>
-          </a:prstGeom>
-          <a:noFill/>
-          <a:effectLst/>
-        </p:spPr>
-        <p:txBody>
-          <a:bodyPr wrap="none" lIns="27432" rIns="27432" tIns="18288" bIns="18288" anchor="ctr">
-            <a:spAutoFit/>
-          </a:bodyPr>
-          <a:lstStyle/>
-          <a:p>
-            <a:pPr algn="l">
-              <a:spcAft>
-                <a:spcPts val="0"/>
-              </a:spcAft>
-            </a:pPr>
-            <a:r>
-              <a:rPr sz="1632" b="0" i="0">
-                <a:solidFill>
-                  <a:srgbClr val="E7F0F3"/>
-                </a:solidFill>
-                <a:latin typeface="Arial"/>
-              </a:rPr>
-              <a:t>u → 0</a:t>
-            </a:r>
-          </a:p>
-        </p:txBody>
-      </p:sp>
-      <p:sp>
-        <p:nvSpPr>
-          <p:cNvPr id="17" name="text16" descr="sci-ppt:C1-E01-016"/>
-          <p:cNvSpPr txBox="1"/>
-          <p:nvPr/>
-        </p:nvSpPr>
-        <p:spPr>
-          <a:xfrm>
-            <a:off x="365760" y="5852160"/>
-            <a:ext cx="5547360" cy="321259"/>
-          </a:xfrm>
-          <a:prstGeom prst="rect">
-            <a:avLst/>
-          </a:prstGeom>
-          <a:noFill/>
-          <a:effectLst/>
-        </p:spPr>
-        <p:txBody>
-          <a:bodyPr wrap="none" lIns="27432" rIns="27432" tIns="18288" bIns="18288" anchor="ctr">
-            <a:spAutoFit/>
-          </a:bodyPr>
-          <a:lstStyle/>
-          <a:p>
-            <a:pPr algn="l">
-              <a:spcAft>
-                <a:spcPts val="0"/>
-              </a:spcAft>
-            </a:pPr>
-            <a:r>
-              <a:rPr sz="1632" b="0" i="0">
-                <a:solidFill>
-                  <a:srgbClr val="E7F0F3"/>
-                </a:solidFill>
-                <a:latin typeface="Arial"/>
-              </a:rPr>
-              <a:t>t = 0</a:t>
-            </a:r>
-          </a:p>
-        </p:txBody>
-      </p:sp>
-      <p:sp>
-        <p:nvSpPr>
-          <p:cNvPr id="18" name="text17" descr="sci-ppt:C1-E01-017"/>
-          <p:cNvSpPr txBox="1"/>
-          <p:nvPr/>
-        </p:nvSpPr>
-        <p:spPr>
-          <a:xfrm>
-            <a:off x="6156960" y="4974336"/>
-            <a:ext cx="5547360" cy="321259"/>
-          </a:xfrm>
-          <a:prstGeom prst="rect">
-            <a:avLst/>
-          </a:prstGeom>
-          <a:noFill/>
-          <a:effectLst/>
-        </p:spPr>
-        <p:txBody>
-          <a:bodyPr wrap="none" lIns="27432" rIns="27432" tIns="18288" bIns="18288" anchor="ctr">
-            <a:spAutoFit/>
-          </a:bodyPr>
-          <a:lstStyle/>
-          <a:p>
-            <a:pPr algn="l">
-              <a:spcAft>
-                <a:spcPts val="0"/>
-              </a:spcAft>
-            </a:pPr>
-            <a:r>
-              <a:rPr sz="1632" b="0" i="0">
-                <a:solidFill>
-                  <a:srgbClr val="E7F0F3"/>
-                </a:solidFill>
-                <a:latin typeface="Arial"/>
-              </a:rPr>
-              <a:t>R₀ &gt; 0</a:t>
-            </a:r>
-          </a:p>
-        </p:txBody>
-      </p:sp>
-      <p:sp>
-        <p:nvSpPr>
-          <p:cNvPr id="19" name="text18" descr="sci-ppt:C1-E01-018"/>
-          <p:cNvSpPr txBox="1"/>
-          <p:nvPr/>
-        </p:nvSpPr>
-        <p:spPr>
-          <a:xfrm>
-            <a:off x="6156960" y="5266944"/>
-            <a:ext cx="5547360" cy="321259"/>
-          </a:xfrm>
-          <a:prstGeom prst="rect">
-            <a:avLst/>
-          </a:prstGeom>
-          <a:noFill/>
-          <a:effectLst/>
-        </p:spPr>
-        <p:txBody>
-          <a:bodyPr wrap="none" lIns="27432" rIns="27432" tIns="18288" bIns="18288" anchor="ctr">
-            <a:spAutoFit/>
-          </a:bodyPr>
-          <a:lstStyle/>
-          <a:p>
-            <a:pPr algn="l">
-              <a:spcAft>
-                <a:spcPts val="0"/>
-              </a:spcAft>
-            </a:pPr>
-            <a:r>
-              <a:rPr sz="1632" b="0" i="0">
-                <a:solidFill>
-                  <a:srgbClr val="E7F0F3"/>
-                </a:solidFill>
-                <a:latin typeface="Arial"/>
-              </a:rPr>
-              <a:t>r → ∞</a:t>
-            </a:r>
-          </a:p>
-        </p:txBody>
-      </p:sp>
-      <p:sp>
-        <p:nvSpPr>
-          <p:cNvPr id="20" name="text19" descr="sci-ppt:C1-E01-019"/>
-          <p:cNvSpPr txBox="1"/>
-          <p:nvPr/>
-        </p:nvSpPr>
-        <p:spPr>
-          <a:xfrm>
-            <a:off x="6156960" y="5559552"/>
-            <a:ext cx="5547360" cy="321259"/>
-          </a:xfrm>
-          <a:prstGeom prst="rect">
-            <a:avLst/>
-          </a:prstGeom>
-          <a:noFill/>
-          <a:effectLst/>
-        </p:spPr>
-        <p:txBody>
-          <a:bodyPr wrap="none" lIns="27432" rIns="27432" tIns="18288" bIns="18288" anchor="ctr">
-            <a:spAutoFit/>
-          </a:bodyPr>
-          <a:lstStyle/>
-          <a:p>
-            <a:pPr algn="l">
-              <a:spcAft>
-                <a:spcPts val="0"/>
-              </a:spcAft>
-            </a:pPr>
-            <a:r>
-              <a:rPr sz="1632" b="0" i="0">
-                <a:solidFill>
-                  <a:srgbClr val="E7F0F3"/>
-                </a:solidFill>
-                <a:latin typeface="Arial"/>
-              </a:rPr>
-              <a:t>p → p∞</a:t>
-            </a:r>
-          </a:p>
-        </p:txBody>
-      </p:sp>
-      <p:sp>
-        <p:nvSpPr>
-          <p:cNvPr id="21" name="text20" descr="sci-ppt:C1-E01-020"/>
-          <p:cNvSpPr txBox="1"/>
-          <p:nvPr/>
-        </p:nvSpPr>
-        <p:spPr>
-          <a:xfrm>
-            <a:off x="365760" y="6339840"/>
-            <a:ext cx="11277600" cy="302361"/>
-          </a:xfrm>
-          <a:prstGeom prst="rect">
-            <a:avLst/>
-          </a:prstGeom>
-          <a:noFill/>
-          <a:effectLst/>
-        </p:spPr>
-        <p:txBody>
-          <a:bodyPr wrap="none" lIns="27432" rIns="27432" tIns="18288" bIns="18288" anchor="ctr">
-            <a:spAutoFit/>
-          </a:bodyPr>
-          <a:lstStyle/>
-          <a:p>
-            <a:pPr algn="l">
-              <a:spcAft>
-                <a:spcPts val="0"/>
-              </a:spcAft>
-            </a:pPr>
-            <a:r>
-              <a:rPr sz="1536" b="0" i="0">
+              <a:rPr sz="1000" b="0" i="0">
                 <a:solidFill>
                   <a:srgbClr val="B4C7D2"/>
                 </a:solidFill>
                 <a:latin typeface="Arial"/>
               </a:rPr>
-              <a:t>Radial direction points from bubble center into carrier</a:t>
-            </a:r>
-          </a:p>
-        </p:txBody>
-      </p:sp>
-      <p:sp>
-        <p:nvSpPr>
-          <p:cNvPr id="22" name="text21" descr="sci-ppt:C1-E01-021"/>
-          <p:cNvSpPr txBox="1"/>
-          <p:nvPr/>
-        </p:nvSpPr>
-        <p:spPr>
-          <a:xfrm>
-            <a:off x="365760" y="6632448"/>
-            <a:ext cx="11277600" cy="302361"/>
-          </a:xfrm>
-          <a:prstGeom prst="rect">
-            <a:avLst/>
-          </a:prstGeom>
-          <a:noFill/>
-          <a:effectLst/>
-        </p:spPr>
-        <p:txBody>
-          <a:bodyPr wrap="none" lIns="27432" rIns="27432" tIns="18288" bIns="18288" anchor="ctr">
-            <a:spAutoFit/>
-          </a:bodyPr>
-          <a:lstStyle/>
-          <a:p>
-            <a:pPr algn="l">
-              <a:spcAft>
-                <a:spcPts val="0"/>
-              </a:spcAft>
-            </a:pPr>
-            <a:r>
-              <a:rPr sz="1536" b="0" i="0">
-                <a:solidFill>
-                  <a:srgbClr val="B4C7D2"/>
-                </a:solidFill>
-                <a:latin typeface="Arial"/>
-              </a:rPr>
-              <a:t>Far-field pressure is an input, not a laser calculation</a:t>
+              <a:t>Trajectory: Rayleigh–Plesset solution for an illustrative 5 µm gas bubble (Eq. C1-E07), drawn only to mark the initial data.</a:t>
             </a:r>
           </a:p>
         </p:txBody>
